--- a/web/showcase/pptx/flagships/default/maven-banner.pptx
+++ b/web/showcase/pptx/flagships/default/maven-banner.pptx
@@ -7344,7 +7344,7 @@
                 </a:solidFill>
                 <a:latin typeface="Courier New"/>
               </a:rPr>
-              <a:t>v2.3.0</a:t>
+              <a:t>v2.4.0</a:t>
             </a:r>
             <a:endParaRPr lang="en-US" sz="1100"/>
           </a:p>

--- a/web/showcase/pptx/flagships/default/maven-banner.pptx
+++ b/web/showcase/pptx/flagships/default/maven-banner.pptx
@@ -7344,7 +7344,7 @@
                 </a:solidFill>
                 <a:latin typeface="Courier New"/>
               </a:rPr>
-              <a:t>v2.4.0</a:t>
+              <a:t>v2.4.1</a:t>
             </a:r>
             <a:endParaRPr lang="en-US" sz="1100"/>
           </a:p>
